--- a/Materjalid/Day7 SQL/7-paev-andmetarkus-esitlus.pptx
+++ b/Materjalid/Day7 SQL/7-paev-andmetarkus-esitlus.pptx
@@ -1003,7 +1003,7 @@
           <a:p>
             <a:fld id="{A5AA0B6A-941B-4944-B140-87817CB84C4C}" type="datetimeFigureOut">
               <a:rPr lang="en-GB" smtClean="0"/>
-              <a:t>08/09/2026</a:t>
+              <a:t>02/10/2026</a:t>
             </a:fld>
             <a:endParaRPr lang="en-GB"/>
           </a:p>
@@ -2038,7 +2038,7 @@
           <a:p>
             <a:fld id="{5BCAD085-E8A6-8845-BD4E-CB4CCA059FC4}" type="datetimeFigureOut">
               <a:rPr lang="en-US" smtClean="0"/>
-              <a:t>9/8/2026</a:t>
+              <a:t>10/2/2026</a:t>
             </a:fld>
             <a:endParaRPr lang="en-US"/>
           </a:p>
@@ -2206,7 +2206,7 @@
           <a:p>
             <a:fld id="{5BCAD085-E8A6-8845-BD4E-CB4CCA059FC4}" type="datetimeFigureOut">
               <a:rPr lang="en-US" smtClean="0"/>
-              <a:t>9/8/2026</a:t>
+              <a:t>10/2/2026</a:t>
             </a:fld>
             <a:endParaRPr lang="en-US"/>
           </a:p>
@@ -2384,7 +2384,7 @@
           <a:p>
             <a:fld id="{5BCAD085-E8A6-8845-BD4E-CB4CCA059FC4}" type="datetimeFigureOut">
               <a:rPr lang="en-US" smtClean="0"/>
-              <a:t>9/8/2026</a:t>
+              <a:t>10/2/2026</a:t>
             </a:fld>
             <a:endParaRPr lang="en-US"/>
           </a:p>
@@ -3284,7 +3284,7 @@
           <a:p>
             <a:fld id="{5BCAD085-E8A6-8845-BD4E-CB4CCA059FC4}" type="datetimeFigureOut">
               <a:rPr lang="en-US" smtClean="0"/>
-              <a:t>9/8/2026</a:t>
+              <a:t>10/2/2026</a:t>
             </a:fld>
             <a:endParaRPr lang="en-US"/>
           </a:p>
@@ -3529,7 +3529,7 @@
           <a:p>
             <a:fld id="{5BCAD085-E8A6-8845-BD4E-CB4CCA059FC4}" type="datetimeFigureOut">
               <a:rPr lang="en-US" smtClean="0"/>
-              <a:t>9/8/2026</a:t>
+              <a:t>10/2/2026</a:t>
             </a:fld>
             <a:endParaRPr lang="en-US"/>
           </a:p>
@@ -3814,7 +3814,7 @@
           <a:p>
             <a:fld id="{5BCAD085-E8A6-8845-BD4E-CB4CCA059FC4}" type="datetimeFigureOut">
               <a:rPr lang="en-US" smtClean="0"/>
-              <a:t>9/8/2026</a:t>
+              <a:t>10/2/2026</a:t>
             </a:fld>
             <a:endParaRPr lang="en-US"/>
           </a:p>
@@ -4233,7 +4233,7 @@
           <a:p>
             <a:fld id="{5BCAD085-E8A6-8845-BD4E-CB4CCA059FC4}" type="datetimeFigureOut">
               <a:rPr lang="en-US" smtClean="0"/>
-              <a:t>9/8/2026</a:t>
+              <a:t>10/2/2026</a:t>
             </a:fld>
             <a:endParaRPr lang="en-US"/>
           </a:p>
@@ -4350,7 +4350,7 @@
           <a:p>
             <a:fld id="{5BCAD085-E8A6-8845-BD4E-CB4CCA059FC4}" type="datetimeFigureOut">
               <a:rPr lang="en-US" smtClean="0"/>
-              <a:t>9/8/2026</a:t>
+              <a:t>10/2/2026</a:t>
             </a:fld>
             <a:endParaRPr lang="en-US"/>
           </a:p>
@@ -4445,7 +4445,7 @@
           <a:p>
             <a:fld id="{5BCAD085-E8A6-8845-BD4E-CB4CCA059FC4}" type="datetimeFigureOut">
               <a:rPr lang="en-US" smtClean="0"/>
-              <a:t>9/8/2026</a:t>
+              <a:t>10/2/2026</a:t>
             </a:fld>
             <a:endParaRPr lang="en-US"/>
           </a:p>
@@ -4720,7 +4720,7 @@
           <a:p>
             <a:fld id="{5BCAD085-E8A6-8845-BD4E-CB4CCA059FC4}" type="datetimeFigureOut">
               <a:rPr lang="en-US" smtClean="0"/>
-              <a:t>9/8/2026</a:t>
+              <a:t>10/2/2026</a:t>
             </a:fld>
             <a:endParaRPr lang="en-US"/>
           </a:p>
@@ -4972,7 +4972,7 @@
           <a:p>
             <a:fld id="{5BCAD085-E8A6-8845-BD4E-CB4CCA059FC4}" type="datetimeFigureOut">
               <a:rPr lang="en-US" smtClean="0"/>
-              <a:t>9/8/2026</a:t>
+              <a:t>10/2/2026</a:t>
             </a:fld>
             <a:endParaRPr lang="en-US"/>
           </a:p>
@@ -5183,7 +5183,7 @@
           <a:p>
             <a:fld id="{5BCAD085-E8A6-8845-BD4E-CB4CCA059FC4}" type="datetimeFigureOut">
               <a:rPr lang="en-US" smtClean="0"/>
-              <a:t>9/8/2026</a:t>
+              <a:t>10/2/2026</a:t>
             </a:fld>
             <a:endParaRPr lang="en-US"/>
           </a:p>
@@ -14587,7 +14587,7 @@
         <p:spPr>
           <a:xfrm>
             <a:off x="365760" y="5394960"/>
-            <a:ext cx="11430000" cy="1005840"/>
+            <a:ext cx="11430000" cy="850392"/>
           </a:xfrm>
           <a:prstGeom prst="roundRect">
             <a:avLst>
@@ -15602,7 +15602,7 @@
         <p:spPr>
           <a:xfrm>
             <a:off x="530352" y="5404104"/>
-            <a:ext cx="11100816" cy="841248"/>
+            <a:ext cx="11100816" cy="900246"/>
           </a:xfrm>
           <a:prstGeom prst="rect">
             <a:avLst/>
@@ -15621,68 +15621,174 @@
               </a:spcAft>
             </a:pPr>
             <a:r>
-              <a:rPr sz="1000" b="0">
-                <a:solidFill>
-                  <a:srgbClr val="E2E8F0"/>
-                </a:solidFill>
-                <a:latin typeface="Consolas"/>
-              </a:rPr>
-              <a:t>SELECT makseviis,</a:t>
-            </a:r>
-          </a:p>
-          <a:p>
-            <a:r>
-              <a:rPr sz="1000" b="0">
-                <a:solidFill>
-                  <a:srgbClr val="E2E8F0"/>
-                </a:solidFill>
-                <a:latin typeface="Consolas"/>
-              </a:rPr>
-              <a:t>       COUNT(*) AS tellimuste_arv,</a:t>
-            </a:r>
-          </a:p>
-          <a:p>
-            <a:r>
-              <a:rPr sz="1000" b="0">
-                <a:solidFill>
-                  <a:srgbClr val="E2E8F0"/>
-                </a:solidFill>
-                <a:latin typeface="Consolas"/>
-              </a:rPr>
-              <a:t>       MIN(kuupäev) AS esimene</a:t>
-            </a:r>
-          </a:p>
-          <a:p>
-            <a:r>
-              <a:rPr sz="1000" b="0">
-                <a:solidFill>
-                  <a:srgbClr val="E2E8F0"/>
-                </a:solidFill>
-                <a:latin typeface="Consolas"/>
-              </a:rPr>
-              <a:t>FROM tellimused</a:t>
-            </a:r>
-          </a:p>
-          <a:p>
-            <a:r>
-              <a:rPr sz="1000" b="0">
-                <a:solidFill>
-                  <a:srgbClr val="E2E8F0"/>
-                </a:solidFill>
-                <a:latin typeface="Consolas"/>
-              </a:rPr>
-              <a:t>GROUP BY makseviis</a:t>
-            </a:r>
-          </a:p>
-          <a:p>
-            <a:r>
-              <a:rPr sz="1000" b="0">
-                <a:solidFill>
-                  <a:srgbClr val="E2E8F0"/>
-                </a:solidFill>
-                <a:latin typeface="Consolas"/>
-              </a:rPr>
-              <a:t>ORDER BY tellimuste_arv DESC;</a:t>
+              <a:rPr sz="1000" b="0" dirty="0">
+                <a:solidFill>
+                  <a:srgbClr val="E2E8F0"/>
+                </a:solidFill>
+                <a:latin typeface="Consolas"/>
+              </a:rPr>
+              <a:t>SELECT </a:t>
+            </a:r>
+            <a:r>
+              <a:rPr sz="1000" b="0" dirty="0" err="1">
+                <a:solidFill>
+                  <a:srgbClr val="E2E8F0"/>
+                </a:solidFill>
+                <a:latin typeface="Consolas"/>
+              </a:rPr>
+              <a:t>makseviis</a:t>
+            </a:r>
+            <a:r>
+              <a:rPr sz="1000" b="0" dirty="0">
+                <a:solidFill>
+                  <a:srgbClr val="E2E8F0"/>
+                </a:solidFill>
+                <a:latin typeface="Consolas"/>
+              </a:rPr>
+              <a:t>,</a:t>
+            </a:r>
+          </a:p>
+          <a:p>
+            <a:r>
+              <a:rPr sz="1000" b="0" dirty="0">
+                <a:solidFill>
+                  <a:srgbClr val="E2E8F0"/>
+                </a:solidFill>
+                <a:latin typeface="Consolas"/>
+              </a:rPr>
+              <a:t>       COUNT(*) AS </a:t>
+            </a:r>
+            <a:r>
+              <a:rPr sz="1000" b="0" dirty="0" err="1">
+                <a:solidFill>
+                  <a:srgbClr val="E2E8F0"/>
+                </a:solidFill>
+                <a:latin typeface="Consolas"/>
+              </a:rPr>
+              <a:t>tellimuste_arv,MIN</a:t>
+            </a:r>
+            <a:r>
+              <a:rPr sz="1000" b="0" dirty="0">
+                <a:solidFill>
+                  <a:srgbClr val="E2E8F0"/>
+                </a:solidFill>
+                <a:latin typeface="Consolas"/>
+              </a:rPr>
+              <a:t>(</a:t>
+            </a:r>
+            <a:r>
+              <a:rPr sz="1000" b="0" dirty="0" err="1">
+                <a:solidFill>
+                  <a:srgbClr val="E2E8F0"/>
+                </a:solidFill>
+                <a:latin typeface="Consolas"/>
+              </a:rPr>
+              <a:t>kuupäev</a:t>
+            </a:r>
+            <a:r>
+              <a:rPr sz="1000" b="0" dirty="0">
+                <a:solidFill>
+                  <a:srgbClr val="E2E8F0"/>
+                </a:solidFill>
+                <a:latin typeface="Consolas"/>
+              </a:rPr>
+              <a:t>) AS </a:t>
+            </a:r>
+            <a:r>
+              <a:rPr sz="1000" b="0" dirty="0" err="1">
+                <a:solidFill>
+                  <a:srgbClr val="E2E8F0"/>
+                </a:solidFill>
+                <a:latin typeface="Consolas"/>
+              </a:rPr>
+              <a:t>esimene</a:t>
+            </a:r>
+            <a:endParaRPr sz="1000" b="0" dirty="0">
+              <a:solidFill>
+                <a:srgbClr val="E2E8F0"/>
+              </a:solidFill>
+              <a:latin typeface="Consolas"/>
+            </a:endParaRPr>
+          </a:p>
+          <a:p>
+            <a:r>
+              <a:rPr sz="1000" b="0" dirty="0">
+                <a:solidFill>
+                  <a:srgbClr val="E2E8F0"/>
+                </a:solidFill>
+                <a:latin typeface="Consolas"/>
+              </a:rPr>
+              <a:t>FROM </a:t>
+            </a:r>
+            <a:r>
+              <a:rPr sz="1000" b="0" dirty="0" err="1">
+                <a:solidFill>
+                  <a:srgbClr val="E2E8F0"/>
+                </a:solidFill>
+                <a:latin typeface="Consolas"/>
+              </a:rPr>
+              <a:t>tellimused</a:t>
+            </a:r>
+            <a:endParaRPr sz="1000" b="0" dirty="0">
+              <a:solidFill>
+                <a:srgbClr val="E2E8F0"/>
+              </a:solidFill>
+              <a:latin typeface="Consolas"/>
+            </a:endParaRPr>
+          </a:p>
+          <a:p>
+            <a:r>
+              <a:rPr sz="1000" b="0" dirty="0">
+                <a:solidFill>
+                  <a:srgbClr val="E2E8F0"/>
+                </a:solidFill>
+                <a:latin typeface="Consolas"/>
+              </a:rPr>
+              <a:t>GROUP BY </a:t>
+            </a:r>
+            <a:r>
+              <a:rPr sz="1000" b="0" dirty="0" err="1">
+                <a:solidFill>
+                  <a:srgbClr val="E2E8F0"/>
+                </a:solidFill>
+                <a:latin typeface="Consolas"/>
+              </a:rPr>
+              <a:t>makseviis</a:t>
+            </a:r>
+            <a:endParaRPr sz="1000" b="0" dirty="0">
+              <a:solidFill>
+                <a:srgbClr val="E2E8F0"/>
+              </a:solidFill>
+              <a:latin typeface="Consolas"/>
+            </a:endParaRPr>
+          </a:p>
+          <a:p>
+            <a:r>
+              <a:rPr sz="1000" b="0" dirty="0">
+                <a:solidFill>
+                  <a:srgbClr val="E2E8F0"/>
+                </a:solidFill>
+                <a:latin typeface="Consolas"/>
+              </a:rPr>
+              <a:t>ORDER BY </a:t>
+            </a:r>
+            <a:r>
+              <a:rPr sz="1000" b="0" dirty="0" err="1">
+                <a:solidFill>
+                  <a:srgbClr val="E2E8F0"/>
+                </a:solidFill>
+                <a:latin typeface="Consolas"/>
+              </a:rPr>
+              <a:t>tellimuste_arv</a:t>
+            </a:r>
+            <a:r>
+              <a:rPr sz="1000" b="0" dirty="0">
+                <a:solidFill>
+                  <a:srgbClr val="E2E8F0"/>
+                </a:solidFill>
+                <a:latin typeface="Consolas"/>
+              </a:rPr>
+              <a:t> DESC;</a:t>
             </a:r>
           </a:p>
         </p:txBody>
@@ -21145,7 +21251,7 @@
         <p:spPr>
           <a:xfrm>
             <a:off x="365760" y="5404104"/>
-            <a:ext cx="11430000" cy="1005840"/>
+            <a:ext cx="11430000" cy="841248"/>
           </a:xfrm>
           <a:prstGeom prst="roundRect">
             <a:avLst>
@@ -22568,7 +22674,7 @@
         <p:spPr>
           <a:xfrm>
             <a:off x="365760" y="5404104"/>
-            <a:ext cx="11430000" cy="1005840"/>
+            <a:ext cx="11430000" cy="900246"/>
           </a:xfrm>
           <a:prstGeom prst="roundRect">
             <a:avLst>
@@ -22615,7 +22721,7 @@
         <p:spPr>
           <a:xfrm>
             <a:off x="530352" y="5404104"/>
-            <a:ext cx="11100816" cy="841248"/>
+            <a:ext cx="11100816" cy="900246"/>
           </a:xfrm>
           <a:prstGeom prst="rect">
             <a:avLst/>
@@ -22634,40 +22740,88 @@
               </a:spcAft>
             </a:pPr>
             <a:r>
-              <a:rPr sz="1000" b="0">
-                <a:solidFill>
-                  <a:srgbClr val="E2E8F0"/>
-                </a:solidFill>
-                <a:latin typeface="Consolas"/>
-              </a:rPr>
-              <a:t>SELECT linn, COUNT(*) AS klientide_arv</a:t>
-            </a:r>
-          </a:p>
-          <a:p>
-            <a:r>
-              <a:rPr sz="1000" b="0">
-                <a:solidFill>
-                  <a:srgbClr val="E2E8F0"/>
-                </a:solidFill>
-                <a:latin typeface="Consolas"/>
-              </a:rPr>
-              <a:t>FROM kliendid</a:t>
-            </a:r>
-          </a:p>
-          <a:p>
-            <a:r>
-              <a:rPr sz="1000" b="0">
-                <a:solidFill>
-                  <a:srgbClr val="E2E8F0"/>
-                </a:solidFill>
-                <a:latin typeface="Consolas"/>
-              </a:rPr>
-              <a:t>WHERE liitumise_kuupäev &gt;= '2025-06-01'</a:t>
-            </a:r>
-          </a:p>
-          <a:p>
-            <a:r>
-              <a:rPr sz="1000" b="0">
+              <a:rPr sz="1000" b="0" dirty="0">
+                <a:solidFill>
+                  <a:srgbClr val="E2E8F0"/>
+                </a:solidFill>
+                <a:latin typeface="Consolas"/>
+              </a:rPr>
+              <a:t>SELECT linn, COUNT(*) AS </a:t>
+            </a:r>
+            <a:r>
+              <a:rPr sz="1000" b="0" dirty="0" err="1">
+                <a:solidFill>
+                  <a:srgbClr val="E2E8F0"/>
+                </a:solidFill>
+                <a:latin typeface="Consolas"/>
+              </a:rPr>
+              <a:t>klientide_arv</a:t>
+            </a:r>
+            <a:endParaRPr sz="1000" b="0" dirty="0">
+              <a:solidFill>
+                <a:srgbClr val="E2E8F0"/>
+              </a:solidFill>
+              <a:latin typeface="Consolas"/>
+            </a:endParaRPr>
+          </a:p>
+          <a:p>
+            <a:r>
+              <a:rPr sz="1000" b="0" dirty="0">
+                <a:solidFill>
+                  <a:srgbClr val="E2E8F0"/>
+                </a:solidFill>
+                <a:latin typeface="Consolas"/>
+              </a:rPr>
+              <a:t>FROM </a:t>
+            </a:r>
+            <a:r>
+              <a:rPr sz="1000" b="0" dirty="0" err="1">
+                <a:solidFill>
+                  <a:srgbClr val="E2E8F0"/>
+                </a:solidFill>
+                <a:latin typeface="Consolas"/>
+              </a:rPr>
+              <a:t>kliendid</a:t>
+            </a:r>
+            <a:endParaRPr sz="1000" b="0" dirty="0">
+              <a:solidFill>
+                <a:srgbClr val="E2E8F0"/>
+              </a:solidFill>
+              <a:latin typeface="Consolas"/>
+            </a:endParaRPr>
+          </a:p>
+          <a:p>
+            <a:r>
+              <a:rPr sz="1000" b="0" dirty="0">
+                <a:solidFill>
+                  <a:srgbClr val="E2E8F0"/>
+                </a:solidFill>
+                <a:latin typeface="Consolas"/>
+              </a:rPr>
+              <a:t>WHERE </a:t>
+            </a:r>
+            <a:r>
+              <a:rPr sz="1000" b="0" dirty="0" err="1">
+                <a:solidFill>
+                  <a:srgbClr val="E2E8F0"/>
+                </a:solidFill>
+                <a:latin typeface="Consolas"/>
+              </a:rPr>
+              <a:t>liitumise_kuupäev</a:t>
+            </a:r>
+            <a:r>
+              <a:rPr sz="1000" b="0" dirty="0">
+                <a:solidFill>
+                  <a:srgbClr val="E2E8F0"/>
+                </a:solidFill>
+                <a:latin typeface="Consolas"/>
+              </a:rPr>
+              <a:t> &gt;= '2025-06-01'</a:t>
+            </a:r>
+          </a:p>
+          <a:p>
+            <a:r>
+              <a:rPr sz="1000" b="0" dirty="0">
                 <a:solidFill>
                   <a:srgbClr val="E2E8F0"/>
                 </a:solidFill>
@@ -22675,10 +22829,17 @@
               </a:rPr>
               <a:t>GROUP BY linn</a:t>
             </a:r>
-          </a:p>
-          <a:p>
-            <a:r>
-              <a:rPr sz="1000" b="0">
+            <a:r>
+              <a:rPr lang="en-GB" sz="1000" b="0" dirty="0">
+                <a:solidFill>
+                  <a:srgbClr val="E2E8F0"/>
+                </a:solidFill>
+                <a:latin typeface="Consolas"/>
+              </a:rPr>
+              <a:t> </a:t>
+            </a:r>
+            <a:r>
+              <a:rPr sz="1000" b="0" dirty="0">
                 <a:solidFill>
                   <a:srgbClr val="E2E8F0"/>
                 </a:solidFill>
@@ -22689,13 +22850,31 @@
           </a:p>
           <a:p>
             <a:r>
-              <a:rPr sz="1000" b="0">
-                <a:solidFill>
-                  <a:srgbClr val="E2E8F0"/>
-                </a:solidFill>
-                <a:latin typeface="Consolas"/>
-              </a:rPr>
-              <a:t>ORDER BY klientide_arv DESC;</a:t>
+              <a:rPr sz="1000" b="0" dirty="0">
+                <a:solidFill>
+                  <a:srgbClr val="E2E8F0"/>
+                </a:solidFill>
+                <a:latin typeface="Consolas"/>
+              </a:rPr>
+              <a:t>ORDER BY </a:t>
+            </a:r>
+            <a:r>
+              <a:rPr sz="1000" b="0" dirty="0" err="1">
+                <a:solidFill>
+                  <a:srgbClr val="E2E8F0"/>
+                </a:solidFill>
+                <a:latin typeface="Consolas"/>
+              </a:rPr>
+              <a:t>klientide_arv</a:t>
+            </a:r>
+            <a:r>
+              <a:rPr sz="1000" b="0" dirty="0">
+                <a:solidFill>
+                  <a:srgbClr val="E2E8F0"/>
+                </a:solidFill>
+                <a:latin typeface="Consolas"/>
+              </a:rPr>
+              <a:t> DESC;</a:t>
             </a:r>
           </a:p>
         </p:txBody>
@@ -23007,51 +23186,6 @@
       </p:grpSpPr>
       <p:sp>
         <p:nvSpPr>
-          <p:cNvPr id="2" name="Rectangle 1"/>
-          <p:cNvSpPr/>
-          <p:nvPr/>
-        </p:nvSpPr>
-        <p:spPr>
-          <a:xfrm>
-            <a:off x="0" y="0"/>
-            <a:ext cx="12191695" cy="6858000"/>
-          </a:xfrm>
-          <a:prstGeom prst="rect">
-            <a:avLst/>
-          </a:prstGeom>
-          <a:solidFill>
-            <a:srgbClr val="F7F9FC"/>
-          </a:solidFill>
-          <a:ln>
-            <a:noFill/>
-          </a:ln>
-          <a:effectLst/>
-        </p:spPr>
-        <p:style>
-          <a:lnRef idx="1">
-            <a:schemeClr val="accent1"/>
-          </a:lnRef>
-          <a:fillRef idx="3">
-            <a:schemeClr val="accent1"/>
-          </a:fillRef>
-          <a:effectRef idx="2">
-            <a:schemeClr val="accent1"/>
-          </a:effectRef>
-          <a:fontRef idx="minor">
-            <a:schemeClr val="lt1"/>
-          </a:fontRef>
-        </p:style>
-        <p:txBody>
-          <a:bodyPr rtlCol="0" anchor="ctr"/>
-          <a:lstStyle/>
-          <a:p>
-            <a:pPr algn="ctr"/>
-            <a:endParaRPr/>
-          </a:p>
-        </p:txBody>
-      </p:sp>
-      <p:sp>
-        <p:nvSpPr>
           <p:cNvPr id="3" name="Rectangle 2"/>
           <p:cNvSpPr/>
           <p:nvPr/>
@@ -26648,51 +26782,6 @@
       </p:grpSpPr>
       <p:sp>
         <p:nvSpPr>
-          <p:cNvPr id="2" name="Rectangle 1"/>
-          <p:cNvSpPr/>
-          <p:nvPr/>
-        </p:nvSpPr>
-        <p:spPr>
-          <a:xfrm>
-            <a:off x="0" y="0"/>
-            <a:ext cx="12191695" cy="6858000"/>
-          </a:xfrm>
-          <a:prstGeom prst="rect">
-            <a:avLst/>
-          </a:prstGeom>
-          <a:solidFill>
-            <a:srgbClr val="F7F9FC"/>
-          </a:solidFill>
-          <a:ln>
-            <a:noFill/>
-          </a:ln>
-          <a:effectLst/>
-        </p:spPr>
-        <p:style>
-          <a:lnRef idx="1">
-            <a:schemeClr val="accent1"/>
-          </a:lnRef>
-          <a:fillRef idx="3">
-            <a:schemeClr val="accent1"/>
-          </a:fillRef>
-          <a:effectRef idx="2">
-            <a:schemeClr val="accent1"/>
-          </a:effectRef>
-          <a:fontRef idx="minor">
-            <a:schemeClr val="lt1"/>
-          </a:fontRef>
-        </p:style>
-        <p:txBody>
-          <a:bodyPr rtlCol="0" anchor="ctr"/>
-          <a:lstStyle/>
-          <a:p>
-            <a:pPr algn="ctr"/>
-            <a:endParaRPr/>
-          </a:p>
-        </p:txBody>
-      </p:sp>
-      <p:sp>
-        <p:nvSpPr>
           <p:cNvPr id="3" name="Rectangle 2"/>
           <p:cNvSpPr/>
           <p:nvPr/>
@@ -28244,51 +28333,6 @@
       </p:grpSpPr>
       <p:sp>
         <p:nvSpPr>
-          <p:cNvPr id="2" name="Rectangle 1"/>
-          <p:cNvSpPr/>
-          <p:nvPr/>
-        </p:nvSpPr>
-        <p:spPr>
-          <a:xfrm>
-            <a:off x="0" y="0"/>
-            <a:ext cx="12191695" cy="6858000"/>
-          </a:xfrm>
-          <a:prstGeom prst="rect">
-            <a:avLst/>
-          </a:prstGeom>
-          <a:solidFill>
-            <a:srgbClr val="F7F9FC"/>
-          </a:solidFill>
-          <a:ln>
-            <a:noFill/>
-          </a:ln>
-          <a:effectLst/>
-        </p:spPr>
-        <p:style>
-          <a:lnRef idx="1">
-            <a:schemeClr val="accent1"/>
-          </a:lnRef>
-          <a:fillRef idx="3">
-            <a:schemeClr val="accent1"/>
-          </a:fillRef>
-          <a:effectRef idx="2">
-            <a:schemeClr val="accent1"/>
-          </a:effectRef>
-          <a:fontRef idx="minor">
-            <a:schemeClr val="lt1"/>
-          </a:fontRef>
-        </p:style>
-        <p:txBody>
-          <a:bodyPr rtlCol="0" anchor="ctr"/>
-          <a:lstStyle/>
-          <a:p>
-            <a:pPr algn="ctr"/>
-            <a:endParaRPr/>
-          </a:p>
-        </p:txBody>
-      </p:sp>
-      <p:sp>
-        <p:nvSpPr>
           <p:cNvPr id="3" name="Rectangle 2"/>
           <p:cNvSpPr/>
           <p:nvPr/>
@@ -29830,8 +29874,8 @@
         </p:nvSpPr>
         <p:spPr>
           <a:xfrm>
-            <a:off x="365760" y="5568696"/>
-            <a:ext cx="11430000" cy="1005840"/>
+            <a:off x="351958" y="5568696"/>
+            <a:ext cx="11430000" cy="788959"/>
           </a:xfrm>
           <a:prstGeom prst="roundRect">
             <a:avLst>
@@ -29878,7 +29922,7 @@
         <p:spPr>
           <a:xfrm>
             <a:off x="545439" y="5559552"/>
-            <a:ext cx="11100816" cy="1054135"/>
+            <a:ext cx="11100816" cy="746358"/>
           </a:xfrm>
           <a:prstGeom prst="rect">
             <a:avLst/>
@@ -30117,10 +30161,17 @@
                 </a:solidFill>
                 <a:latin typeface="Consolas"/>
               </a:rPr>
-              <a:t>' THEN 'OK'</a:t>
-            </a:r>
-          </a:p>
-          <a:p>
+              <a:t>' THEN 'OK'              WHEN </a:t>
+            </a:r>
+            <a:r>
+              <a:rPr sz="1000" b="0" dirty="0" err="1">
+                <a:solidFill>
+                  <a:srgbClr val="E2E8F0"/>
+                </a:solidFill>
+                <a:latin typeface="Consolas"/>
+              </a:rPr>
+              <a:t>staatus</a:t>
+            </a:r>
             <a:r>
               <a:rPr sz="1000" b="0" dirty="0">
                 <a:solidFill>
@@ -30128,7 +30179,7 @@
                 </a:solidFill>
                 <a:latin typeface="Consolas"/>
               </a:rPr>
-              <a:t>              WHEN </a:t>
+              <a:t> = '</a:t>
             </a:r>
             <a:r>
               <a:rPr sz="1000" b="0" dirty="0" err="1">
@@ -30137,7 +30188,7 @@
                 </a:solidFill>
                 <a:latin typeface="Consolas"/>
               </a:rPr>
-              <a:t>staatus</a:t>
+              <a:t>Tühistatud</a:t>
             </a:r>
             <a:r>
               <a:rPr sz="1000" b="0" dirty="0">
@@ -30146,7 +30197,7 @@
                 </a:solidFill>
                 <a:latin typeface="Consolas"/>
               </a:rPr>
-              <a:t> = '</a:t>
+              <a:t>' THEN '</a:t>
             </a:r>
             <a:r>
               <a:rPr sz="1000" b="0" dirty="0" err="1">
@@ -30155,7 +30206,7 @@
                 </a:solidFill>
                 <a:latin typeface="Consolas"/>
               </a:rPr>
-              <a:t>Tühistatud</a:t>
+              <a:t>Katkestatud</a:t>
             </a:r>
             <a:r>
               <a:rPr sz="1000" b="0" dirty="0">
@@ -30164,36 +30215,7 @@
                 </a:solidFill>
                 <a:latin typeface="Consolas"/>
               </a:rPr>
-              <a:t>' THEN '</a:t>
-            </a:r>
-            <a:r>
-              <a:rPr sz="1000" b="0" dirty="0" err="1">
-                <a:solidFill>
-                  <a:srgbClr val="E2E8F0"/>
-                </a:solidFill>
-                <a:latin typeface="Consolas"/>
-              </a:rPr>
-              <a:t>Katkestatud</a:t>
-            </a:r>
-            <a:r>
-              <a:rPr sz="1000" b="0" dirty="0">
-                <a:solidFill>
-                  <a:srgbClr val="E2E8F0"/>
-                </a:solidFill>
-                <a:latin typeface="Consolas"/>
-              </a:rPr>
-              <a:t>'</a:t>
-            </a:r>
-          </a:p>
-          <a:p>
-            <a:r>
-              <a:rPr sz="1000" b="0" dirty="0">
-                <a:solidFill>
-                  <a:srgbClr val="E2E8F0"/>
-                </a:solidFill>
-                <a:latin typeface="Consolas"/>
-              </a:rPr>
-              <a:t>              ELSE '</a:t>
+              <a:t>'              ELSE '</a:t>
             </a:r>
             <a:r>
               <a:rPr sz="1000" b="0" dirty="0" err="1">
@@ -30270,51 +30292,6 @@
           <a:chExt cx="0" cy="0"/>
         </a:xfrm>
       </p:grpSpPr>
-      <p:sp>
-        <p:nvSpPr>
-          <p:cNvPr id="2" name="Rectangle 1"/>
-          <p:cNvSpPr/>
-          <p:nvPr/>
-        </p:nvSpPr>
-        <p:spPr>
-          <a:xfrm>
-            <a:off x="0" y="0"/>
-            <a:ext cx="12191695" cy="6858000"/>
-          </a:xfrm>
-          <a:prstGeom prst="rect">
-            <a:avLst/>
-          </a:prstGeom>
-          <a:solidFill>
-            <a:srgbClr val="F7F9FC"/>
-          </a:solidFill>
-          <a:ln>
-            <a:noFill/>
-          </a:ln>
-          <a:effectLst/>
-        </p:spPr>
-        <p:style>
-          <a:lnRef idx="1">
-            <a:schemeClr val="accent1"/>
-          </a:lnRef>
-          <a:fillRef idx="3">
-            <a:schemeClr val="accent1"/>
-          </a:fillRef>
-          <a:effectRef idx="2">
-            <a:schemeClr val="accent1"/>
-          </a:effectRef>
-          <a:fontRef idx="minor">
-            <a:schemeClr val="lt1"/>
-          </a:fontRef>
-        </p:style>
-        <p:txBody>
-          <a:bodyPr rtlCol="0" anchor="ctr"/>
-          <a:lstStyle/>
-          <a:p>
-            <a:pPr algn="ctr"/>
-            <a:endParaRPr/>
-          </a:p>
-        </p:txBody>
-      </p:sp>
       <p:sp>
         <p:nvSpPr>
           <p:cNvPr id="3" name="Rectangle 2"/>
@@ -33209,7 +33186,7 @@
         <p:spPr>
           <a:xfrm>
             <a:off x="365760" y="4876800"/>
-            <a:ext cx="11430000" cy="1725168"/>
+            <a:ext cx="11430000" cy="1423416"/>
           </a:xfrm>
           <a:prstGeom prst="roundRect">
             <a:avLst>
@@ -33256,7 +33233,7 @@
         <p:spPr>
           <a:xfrm>
             <a:off x="530352" y="4968240"/>
-            <a:ext cx="11100816" cy="1371600"/>
+            <a:ext cx="11100816" cy="1238801"/>
           </a:xfrm>
           <a:prstGeom prst="rect">
             <a:avLst/>
@@ -33275,73 +33252,192 @@
               </a:spcAft>
             </a:pPr>
             <a:r>
-              <a:rPr sz="1200" b="0">
-                <a:solidFill>
-                  <a:srgbClr val="E2E8F0"/>
-                </a:solidFill>
-                <a:latin typeface="Consolas"/>
-              </a:rPr>
-              <a:t>SELECT tarneviis,</a:t>
-            </a:r>
-          </a:p>
-          <a:p>
-            <a:r>
-              <a:rPr sz="1200" b="0">
-                <a:solidFill>
-                  <a:srgbClr val="E2E8F0"/>
-                </a:solidFill>
-                <a:latin typeface="Consolas"/>
-              </a:rPr>
-              <a:t>       COUNT(*) AS tellimuste_arv,</a:t>
-            </a:r>
-          </a:p>
-          <a:p>
-            <a:r>
-              <a:rPr sz="1200" b="0">
-                <a:solidFill>
-                  <a:srgbClr val="E2E8F0"/>
-                </a:solidFill>
-                <a:latin typeface="Consolas"/>
-              </a:rPr>
-              <a:t>       MAX(kuupäev) AS viimane,</a:t>
-            </a:r>
-          </a:p>
-          <a:p>
-            <a:r>
-              <a:rPr sz="1200" b="0">
-                <a:solidFill>
-                  <a:srgbClr val="E2E8F0"/>
-                </a:solidFill>
-                <a:latin typeface="Consolas"/>
-              </a:rPr>
-              <a:t>       CASE WHEN COUNT(*) &gt; 8 THEN 'Sage' ELSE 'Harv' END AS sagedus</a:t>
-            </a:r>
-          </a:p>
-          <a:p>
-            <a:r>
-              <a:rPr sz="1200" b="0">
-                <a:solidFill>
-                  <a:srgbClr val="E2E8F0"/>
-                </a:solidFill>
-                <a:latin typeface="Consolas"/>
-              </a:rPr>
-              <a:t>FROM tellimused</a:t>
-            </a:r>
-          </a:p>
-          <a:p>
-            <a:r>
-              <a:rPr sz="1200" b="0">
-                <a:solidFill>
-                  <a:srgbClr val="E2E8F0"/>
-                </a:solidFill>
-                <a:latin typeface="Consolas"/>
-              </a:rPr>
-              <a:t>GROUP BY tarneviis</a:t>
-            </a:r>
-          </a:p>
-          <a:p>
-            <a:r>
-              <a:rPr sz="1200" b="0">
+              <a:rPr sz="1200" b="0" dirty="0">
+                <a:solidFill>
+                  <a:srgbClr val="E2E8F0"/>
+                </a:solidFill>
+                <a:latin typeface="Consolas"/>
+              </a:rPr>
+              <a:t>SELECT </a:t>
+            </a:r>
+            <a:r>
+              <a:rPr sz="1200" b="0" dirty="0" err="1">
+                <a:solidFill>
+                  <a:srgbClr val="E2E8F0"/>
+                </a:solidFill>
+                <a:latin typeface="Consolas"/>
+              </a:rPr>
+              <a:t>tarneviis</a:t>
+            </a:r>
+            <a:r>
+              <a:rPr sz="1200" b="0" dirty="0">
+                <a:solidFill>
+                  <a:srgbClr val="E2E8F0"/>
+                </a:solidFill>
+                <a:latin typeface="Consolas"/>
+              </a:rPr>
+              <a:t>,</a:t>
+            </a:r>
+          </a:p>
+          <a:p>
+            <a:r>
+              <a:rPr sz="1200" b="0" dirty="0">
+                <a:solidFill>
+                  <a:srgbClr val="E2E8F0"/>
+                </a:solidFill>
+                <a:latin typeface="Consolas"/>
+              </a:rPr>
+              <a:t>       COUNT(*) AS </a:t>
+            </a:r>
+            <a:r>
+              <a:rPr sz="1200" b="0" dirty="0" err="1">
+                <a:solidFill>
+                  <a:srgbClr val="E2E8F0"/>
+                </a:solidFill>
+                <a:latin typeface="Consolas"/>
+              </a:rPr>
+              <a:t>tellimuste_arv</a:t>
+            </a:r>
+            <a:r>
+              <a:rPr sz="1200" b="0" dirty="0">
+                <a:solidFill>
+                  <a:srgbClr val="E2E8F0"/>
+                </a:solidFill>
+                <a:latin typeface="Consolas"/>
+              </a:rPr>
+              <a:t>,</a:t>
+            </a:r>
+          </a:p>
+          <a:p>
+            <a:r>
+              <a:rPr sz="1200" b="0" dirty="0">
+                <a:solidFill>
+                  <a:srgbClr val="E2E8F0"/>
+                </a:solidFill>
+                <a:latin typeface="Consolas"/>
+              </a:rPr>
+              <a:t>       MAX(</a:t>
+            </a:r>
+            <a:r>
+              <a:rPr sz="1200" b="0" dirty="0" err="1">
+                <a:solidFill>
+                  <a:srgbClr val="E2E8F0"/>
+                </a:solidFill>
+                <a:latin typeface="Consolas"/>
+              </a:rPr>
+              <a:t>kuupäev</a:t>
+            </a:r>
+            <a:r>
+              <a:rPr sz="1200" b="0" dirty="0">
+                <a:solidFill>
+                  <a:srgbClr val="E2E8F0"/>
+                </a:solidFill>
+                <a:latin typeface="Consolas"/>
+              </a:rPr>
+              <a:t>) AS </a:t>
+            </a:r>
+            <a:r>
+              <a:rPr sz="1200" b="0" dirty="0" err="1">
+                <a:solidFill>
+                  <a:srgbClr val="E2E8F0"/>
+                </a:solidFill>
+                <a:latin typeface="Consolas"/>
+              </a:rPr>
+              <a:t>viimane</a:t>
+            </a:r>
+            <a:r>
+              <a:rPr sz="1200" b="0" dirty="0">
+                <a:solidFill>
+                  <a:srgbClr val="E2E8F0"/>
+                </a:solidFill>
+                <a:latin typeface="Consolas"/>
+              </a:rPr>
+              <a:t>,</a:t>
+            </a:r>
+          </a:p>
+          <a:p>
+            <a:r>
+              <a:rPr sz="1200" b="0" dirty="0">
+                <a:solidFill>
+                  <a:srgbClr val="E2E8F0"/>
+                </a:solidFill>
+                <a:latin typeface="Consolas"/>
+              </a:rPr>
+              <a:t>       CASE WHEN COUNT(*) &gt; 8 THEN 'Sage' ELSE 'Harv' END AS </a:t>
+            </a:r>
+            <a:r>
+              <a:rPr sz="1200" b="0" dirty="0" err="1">
+                <a:solidFill>
+                  <a:srgbClr val="E2E8F0"/>
+                </a:solidFill>
+                <a:latin typeface="Consolas"/>
+              </a:rPr>
+              <a:t>sagedus</a:t>
+            </a:r>
+            <a:endParaRPr sz="1200" b="0" dirty="0">
+              <a:solidFill>
+                <a:srgbClr val="E2E8F0"/>
+              </a:solidFill>
+              <a:latin typeface="Consolas"/>
+            </a:endParaRPr>
+          </a:p>
+          <a:p>
+            <a:r>
+              <a:rPr sz="1200" b="0" dirty="0">
+                <a:solidFill>
+                  <a:srgbClr val="E2E8F0"/>
+                </a:solidFill>
+                <a:latin typeface="Consolas"/>
+              </a:rPr>
+              <a:t>FROM </a:t>
+            </a:r>
+            <a:r>
+              <a:rPr sz="1200" b="0" dirty="0" err="1">
+                <a:solidFill>
+                  <a:srgbClr val="E2E8F0"/>
+                </a:solidFill>
+                <a:latin typeface="Consolas"/>
+              </a:rPr>
+              <a:t>tellimused</a:t>
+            </a:r>
+            <a:r>
+              <a:rPr lang="en-GB" sz="1200" b="0" dirty="0">
+                <a:solidFill>
+                  <a:srgbClr val="E2E8F0"/>
+                </a:solidFill>
+                <a:latin typeface="Consolas"/>
+              </a:rPr>
+              <a:t> </a:t>
+            </a:r>
+            <a:r>
+              <a:rPr sz="1200" b="0" dirty="0">
+                <a:solidFill>
+                  <a:srgbClr val="E2E8F0"/>
+                </a:solidFill>
+                <a:latin typeface="Consolas"/>
+              </a:rPr>
+              <a:t>GROUP BY </a:t>
+            </a:r>
+            <a:r>
+              <a:rPr sz="1200" b="0" dirty="0" err="1">
+                <a:solidFill>
+                  <a:srgbClr val="E2E8F0"/>
+                </a:solidFill>
+                <a:latin typeface="Consolas"/>
+              </a:rPr>
+              <a:t>tarneviis</a:t>
+            </a:r>
+            <a:r>
+              <a:rPr lang="en-GB" sz="1200" b="0" dirty="0">
+                <a:solidFill>
+                  <a:srgbClr val="E2E8F0"/>
+                </a:solidFill>
+                <a:latin typeface="Consolas"/>
+              </a:rPr>
+              <a:t> </a:t>
+            </a:r>
+            <a:r>
+              <a:rPr sz="1200" b="0" dirty="0">
                 <a:solidFill>
                   <a:srgbClr val="E2E8F0"/>
                 </a:solidFill>
@@ -33352,13 +33448,31 @@
           </a:p>
           <a:p>
             <a:r>
-              <a:rPr sz="1200" b="0">
-                <a:solidFill>
-                  <a:srgbClr val="E2E8F0"/>
-                </a:solidFill>
-                <a:latin typeface="Consolas"/>
-              </a:rPr>
-              <a:t>ORDER BY tellimuste_arv DESC;</a:t>
+              <a:rPr sz="1200" b="0" dirty="0">
+                <a:solidFill>
+                  <a:srgbClr val="E2E8F0"/>
+                </a:solidFill>
+                <a:latin typeface="Consolas"/>
+              </a:rPr>
+              <a:t>ORDER BY </a:t>
+            </a:r>
+            <a:r>
+              <a:rPr sz="1200" b="0" dirty="0" err="1">
+                <a:solidFill>
+                  <a:srgbClr val="E2E8F0"/>
+                </a:solidFill>
+                <a:latin typeface="Consolas"/>
+              </a:rPr>
+              <a:t>tellimuste_arv</a:t>
+            </a:r>
+            <a:r>
+              <a:rPr sz="1200" b="0" dirty="0">
+                <a:solidFill>
+                  <a:srgbClr val="E2E8F0"/>
+                </a:solidFill>
+                <a:latin typeface="Consolas"/>
+              </a:rPr>
+              <a:t> DESC;</a:t>
             </a:r>
           </a:p>
         </p:txBody>
@@ -34046,51 +34160,6 @@
           <a:chExt cx="0" cy="0"/>
         </a:xfrm>
       </p:grpSpPr>
-      <p:sp>
-        <p:nvSpPr>
-          <p:cNvPr id="2" name="Rectangle 1"/>
-          <p:cNvSpPr/>
-          <p:nvPr/>
-        </p:nvSpPr>
-        <p:spPr>
-          <a:xfrm>
-            <a:off x="0" y="0"/>
-            <a:ext cx="12191695" cy="6858000"/>
-          </a:xfrm>
-          <a:prstGeom prst="rect">
-            <a:avLst/>
-          </a:prstGeom>
-          <a:solidFill>
-            <a:srgbClr val="F7F9FC"/>
-          </a:solidFill>
-          <a:ln>
-            <a:noFill/>
-          </a:ln>
-          <a:effectLst/>
-        </p:spPr>
-        <p:style>
-          <a:lnRef idx="1">
-            <a:schemeClr val="accent1"/>
-          </a:lnRef>
-          <a:fillRef idx="3">
-            <a:schemeClr val="accent1"/>
-          </a:fillRef>
-          <a:effectRef idx="2">
-            <a:schemeClr val="accent1"/>
-          </a:effectRef>
-          <a:fontRef idx="minor">
-            <a:schemeClr val="lt1"/>
-          </a:fontRef>
-        </p:style>
-        <p:txBody>
-          <a:bodyPr rtlCol="0" anchor="ctr"/>
-          <a:lstStyle/>
-          <a:p>
-            <a:pPr algn="ctr"/>
-            <a:endParaRPr/>
-          </a:p>
-        </p:txBody>
-      </p:sp>
       <p:sp>
         <p:nvSpPr>
           <p:cNvPr id="3" name="Rectangle 2"/>
